--- a/apps/resources/bundled_files/3-klass-bolchok-tushunugu-oyun-atyshuu.pptx
+++ b/apps/resources/bundled_files/3-klass-bolchok-tushunugu-oyun-atyshuu.pptx
@@ -3797,7 +3797,7 @@
                 </a:solidFill>
                 <a:latin typeface="PT Sans"/>
               </a:rPr>
-              <a:t>3-класс ›</a:t>
+              <a:t/>
             </a:r>
           </a:p>
           <a:p>
@@ -4705,7 +4705,7 @@
                 </a:solidFill>
                 <a:latin typeface="PT Sans"/>
               </a:rPr>
-              <a:t>3-класс ›</a:t>
+              <a:t/>
             </a:r>
           </a:p>
           <a:p>
@@ -5165,7 +5165,7 @@
                 </a:solidFill>
                 <a:latin typeface="PT Sans"/>
               </a:rPr>
-              <a:t>3-класс ›</a:t>
+              <a:t/>
             </a:r>
           </a:p>
           <a:p>
@@ -5643,7 +5643,7 @@
                 </a:solidFill>
                 <a:latin typeface="PT Sans"/>
               </a:rPr>
-              <a:t>3-класс ›</a:t>
+              <a:t/>
             </a:r>
           </a:p>
           <a:p>
@@ -6429,7 +6429,7 @@
                 </a:solidFill>
                 <a:latin typeface="PT Sans"/>
               </a:rPr>
-              <a:t>3-класс ›</a:t>
+              <a:t/>
             </a:r>
           </a:p>
           <a:p>
@@ -7233,7 +7233,7 @@
                 </a:solidFill>
                 <a:latin typeface="PT Sans"/>
               </a:rPr>
-              <a:t>3-класс ›</a:t>
+              <a:t/>
             </a:r>
           </a:p>
           <a:p>
@@ -7693,7 +7693,7 @@
                 </a:solidFill>
                 <a:latin typeface="PT Sans"/>
               </a:rPr>
-              <a:t>3-класс ›</a:t>
+              <a:t/>
             </a:r>
           </a:p>
           <a:p>
@@ -8171,7 +8171,7 @@
                 </a:solidFill>
                 <a:latin typeface="PT Sans"/>
               </a:rPr>
-              <a:t>3-класс ›</a:t>
+              <a:t/>
             </a:r>
           </a:p>
           <a:p>
@@ -8631,7 +8631,7 @@
                 </a:solidFill>
                 <a:latin typeface="PT Sans"/>
               </a:rPr>
-              <a:t>3-класс ›</a:t>
+              <a:t/>
             </a:r>
           </a:p>
           <a:p>
@@ -9109,7 +9109,7 @@
                 </a:solidFill>
                 <a:latin typeface="PT Sans"/>
               </a:rPr>
-              <a:t>3-класс ›</a:t>
+              <a:t/>
             </a:r>
           </a:p>
           <a:p>
@@ -10055,7 +10055,7 @@
                 </a:solidFill>
                 <a:latin typeface="PT Sans"/>
               </a:rPr>
-              <a:t>3-класс ›</a:t>
+              <a:t/>
             </a:r>
           </a:p>
           <a:p>
@@ -11019,7 +11019,7 @@
                 </a:solidFill>
                 <a:latin typeface="PT Sans"/>
               </a:rPr>
-              <a:t>3-класс ›</a:t>
+              <a:t/>
             </a:r>
           </a:p>
           <a:p>
@@ -11932,7 +11932,7 @@
                 </a:solidFill>
                 <a:latin typeface="PT Sans"/>
               </a:rPr>
-              <a:t>3-класс ›</a:t>
+              <a:t/>
             </a:r>
           </a:p>
           <a:p>
@@ -12392,7 +12392,7 @@
                 </a:solidFill>
                 <a:latin typeface="PT Sans"/>
               </a:rPr>
-              <a:t>3-класс ›</a:t>
+              <a:t/>
             </a:r>
           </a:p>
           <a:p>
@@ -12870,7 +12870,7 @@
                 </a:solidFill>
                 <a:latin typeface="PT Sans"/>
               </a:rPr>
-              <a:t>3-класс ›</a:t>
+              <a:t/>
             </a:r>
           </a:p>
           <a:p>
@@ -13330,7 +13330,7 @@
                 </a:solidFill>
                 <a:latin typeface="PT Sans"/>
               </a:rPr>
-              <a:t>3-класс ›</a:t>
+              <a:t/>
             </a:r>
           </a:p>
           <a:p>
@@ -13808,7 +13808,7 @@
                 </a:solidFill>
                 <a:latin typeface="PT Sans"/>
               </a:rPr>
-              <a:t>3-класс ›</a:t>
+              <a:t/>
             </a:r>
           </a:p>
           <a:p>
@@ -14406,7 +14406,7 @@
                 </a:solidFill>
                 <a:latin typeface="PT Sans"/>
               </a:rPr>
-              <a:t>3-класс ›</a:t>
+              <a:t/>
             </a:r>
           </a:p>
           <a:p>
@@ -15022,7 +15022,7 @@
                 </a:solidFill>
                 <a:latin typeface="PT Sans"/>
               </a:rPr>
-              <a:t>3-класс ›</a:t>
+              <a:t/>
             </a:r>
           </a:p>
           <a:p>
@@ -15953,7 +15953,7 @@
                 </a:solidFill>
                 <a:latin typeface="PT Sans"/>
               </a:rPr>
-              <a:t>3-класс ›</a:t>
+              <a:t/>
             </a:r>
           </a:p>
           <a:p>
@@ -16413,7 +16413,7 @@
                 </a:solidFill>
                 <a:latin typeface="PT Sans"/>
               </a:rPr>
-              <a:t>3-класс ›</a:t>
+              <a:t/>
             </a:r>
           </a:p>
           <a:p>
@@ -16891,7 +16891,7 @@
                 </a:solidFill>
                 <a:latin typeface="PT Sans"/>
               </a:rPr>
-              <a:t>3-класс ›</a:t>
+              <a:t/>
             </a:r>
           </a:p>
           <a:p>
@@ -17351,7 +17351,7 @@
                 </a:solidFill>
                 <a:latin typeface="PT Sans"/>
               </a:rPr>
-              <a:t>3-класс ›</a:t>
+              <a:t/>
             </a:r>
           </a:p>
           <a:p>
@@ -17829,7 +17829,7 @@
                 </a:solidFill>
                 <a:latin typeface="PT Sans"/>
               </a:rPr>
-              <a:t>3-класс ›</a:t>
+              <a:t/>
             </a:r>
           </a:p>
           <a:p>
@@ -18519,7 +18519,7 @@
                 </a:solidFill>
                 <a:latin typeface="PT Sans"/>
               </a:rPr>
-              <a:t>3-класс ›</a:t>
+              <a:t/>
             </a:r>
           </a:p>
           <a:p>
